--- a/presentations/PR_L05_WaitingRoom_Lesson.pptx
+++ b/presentations/PR_L05_WaitingRoom_Lesson.pptx
@@ -2617,7 +2617,7 @@
                 <a:ea typeface="IBM Plex Sans" pitchFamily="34" charset="-122"/>
                 <a:cs typeface="IBM Plex Sans" pitchFamily="34" charset="-120"/>
               </a:rPr>
-              <a:t>Mistake: reporting inside the loop, which prints a line for every item read.</a:t>
+              <a:t>Common mistake: reporting inside the loop, which prints a line for every item read.</a:t>
             </a:r>
             <a:endParaRPr lang="en-US" sz="1700" dirty="0"/>
           </a:p>
@@ -7773,7 +7773,7 @@
                 <a:ea typeface="IBM Plex Sans" pitchFamily="34" charset="-122"/>
                 <a:cs typeface="IBM Plex Sans" pitchFamily="34" charset="-120"/>
               </a:rPr>
-              <a:t>Mistake: never changing the condition inside the loop, which leaves it running forever.</a:t>
+              <a:t>Common mistake: never changing the condition inside the loop, which leaves it running forever.</a:t>
             </a:r>
             <a:endParaRPr lang="en-US" sz="1700" dirty="0"/>
           </a:p>
@@ -8349,7 +8349,7 @@
                 <a:ea typeface="IBM Plex Sans" pitchFamily="34" charset="-122"/>
                 <a:cs typeface="IBM Plex Sans" pitchFamily="34" charset="-120"/>
               </a:rPr>
-              <a:t>Mistake: leaving the second read out, so the same bad value is tested forever.</a:t>
+              <a:t>Common mistake: leaving the second read out, so the same bad value is tested forever.</a:t>
             </a:r>
             <a:endParaRPr lang="en-US" sz="1700" dirty="0"/>
           </a:p>
@@ -8925,7 +8925,7 @@
                 <a:ea typeface="IBM Plex Sans" pitchFamily="34" charset="-122"/>
                 <a:cs typeface="IBM Plex Sans" pitchFamily="34" charset="-120"/>
               </a:rPr>
-              <a:t>Mistake: counting the sentinel itself as one of the real values.</a:t>
+              <a:t>Common mistake: counting the sentinel itself as one of the real values.</a:t>
             </a:r>
             <a:endParaRPr lang="en-US" sz="1700" dirty="0"/>
           </a:p>
@@ -9501,7 +9501,7 @@
                 <a:ea typeface="IBM Plex Sans" pitchFamily="34" charset="-122"/>
                 <a:cs typeface="IBM Plex Sans" pitchFamily="34" charset="-120"/>
               </a:rPr>
-              <a:t>Mistake: updating the counter after the loop has already finished.</a:t>
+              <a:t>Common mistake: updating the counter after the loop has already finished.</a:t>
             </a:r>
             <a:endParaRPr lang="en-US" sz="1700" dirty="0"/>
           </a:p>
@@ -10077,7 +10077,7 @@
                 <a:ea typeface="IBM Plex Sans" pitchFamily="34" charset="-122"/>
                 <a:cs typeface="IBM Plex Sans" pitchFamily="34" charset="-120"/>
               </a:rPr>
-              <a:t>Mistake: a while loop with its own counter where a for loop would be shorter and safer.</a:t>
+              <a:t>Common mistake: a while loop with its own counter where a for loop would be shorter and safer.</a:t>
             </a:r>
             <a:endParaRPr lang="en-US" sz="1700" dirty="0"/>
           </a:p>
